--- a/docs/procurement_logistics_ai.pptx
+++ b/docs/procurement_logistics_ai.pptx
@@ -150,7 +150,7 @@
 <p1510:revInfo xmlns:a="http://schemas.openxmlformats.org/drawingml/2006/main" xmlns:r="http://schemas.openxmlformats.org/officeDocument/2006/relationships" xmlns:p1510="http://schemas.microsoft.com/office/powerpoint/2015/10/main">
   <p1510:revLst>
     <p1510:client id="{41194A14-DEA4-43D1-6AE0-680207CD8132}" v="2309" dt="2026-05-18T14:59:02.734"/>
-    <p1510:client id="{604FCC6F-3D47-A295-75EC-19558837CE6F}" v="195" dt="2026-05-18T15:24:24.661"/>
+    <p1510:client id="{604FCC6F-3D47-A295-75EC-19558837CE6F}" v="200" dt="2026-05-18T15:26:39.304"/>
   </p1510:revLst>
 </p1510:revInfo>
 </file>
@@ -5777,7 +5777,7 @@
               <a:t> </a:t>
             </a:r>
             <a:r>
-              <a:rPr lang="en-US" sz="1400" dirty="0" err="1">
+              <a:rPr lang="en-US" sz="1400" b="1" dirty="0" err="1">
                 <a:solidFill>
                   <a:schemeClr val="tx2"/>
                 </a:solidFill>
@@ -5788,7 +5788,7 @@
               <a:t>거점</a:t>
             </a:r>
             <a:r>
-              <a:rPr lang="en-US" sz="1400" dirty="0">
+              <a:rPr lang="en-US" sz="1400" b="1" dirty="0">
                 <a:solidFill>
                   <a:schemeClr val="tx2"/>
                 </a:solidFill>
@@ -5799,7 +5799,7 @@
               <a:t> </a:t>
             </a:r>
             <a:r>
-              <a:rPr lang="en-US" sz="1400" dirty="0" err="1">
+              <a:rPr lang="en-US" sz="1400" b="1" dirty="0" err="1">
                 <a:solidFill>
                   <a:schemeClr val="tx2"/>
                 </a:solidFill>
@@ -5807,10 +5807,10 @@
                 <a:ea typeface="Malgun Gothic"/>
                 <a:cs typeface="Calibri"/>
               </a:rPr>
-              <a:t>후보를</a:t>
-            </a:r>
-            <a:r>
-              <a:rPr lang="en-US" sz="1400" dirty="0">
+              <a:t>후보</a:t>
+            </a:r>
+            <a:r>
+              <a:rPr lang="en-US" sz="1400" dirty="0" err="1">
                 <a:solidFill>
                   <a:schemeClr val="tx2"/>
                 </a:solidFill>
@@ -5818,10 +5818,10 @@
                 <a:ea typeface="Malgun Gothic"/>
                 <a:cs typeface="Calibri"/>
               </a:rPr>
-              <a:t> </a:t>
-            </a:r>
-            <a:r>
-              <a:rPr lang="ko-KR" altLang="en-US" sz="1400" dirty="0" err="1">
+              <a:t>를</a:t>
+            </a:r>
+            <a:r>
+              <a:rPr lang="en-US" sz="1400" dirty="0">
                 <a:solidFill>
                   <a:schemeClr val="tx2"/>
                 </a:solidFill>
@@ -5829,10 +5829,10 @@
                 <a:ea typeface="Malgun Gothic"/>
                 <a:cs typeface="Calibri"/>
               </a:rPr>
-              <a:t>자동으로</a:t>
-            </a:r>
-            <a:r>
-              <a:rPr lang="en-US" sz="1400" dirty="0">
+              <a:t> </a:t>
+            </a:r>
+            <a:r>
+              <a:rPr lang="ko-KR" altLang="en-US" sz="1400" b="1" dirty="0">
                 <a:solidFill>
                   <a:schemeClr val="tx2"/>
                 </a:solidFill>
@@ -5840,10 +5840,32 @@
                 <a:ea typeface="Malgun Gothic"/>
                 <a:cs typeface="Calibri"/>
               </a:rPr>
+              <a:t>자동</a:t>
+            </a:r>
+            <a:r>
+              <a:rPr lang="ko-KR" altLang="en-US" sz="1400" dirty="0">
+                <a:solidFill>
+                  <a:schemeClr val="tx2"/>
+                </a:solidFill>
+                <a:latin typeface="Malgun Gothic"/>
+                <a:ea typeface="Malgun Gothic"/>
+                <a:cs typeface="Calibri"/>
+              </a:rPr>
+              <a:t>으로</a:t>
+            </a:r>
+            <a:r>
+              <a:rPr lang="en-US" sz="1400" dirty="0">
+                <a:solidFill>
+                  <a:schemeClr val="tx2"/>
+                </a:solidFill>
+                <a:latin typeface="Malgun Gothic"/>
+                <a:ea typeface="Malgun Gothic"/>
+                <a:cs typeface="Calibri"/>
+              </a:rPr>
               <a:t> </a:t>
             </a:r>
             <a:r>
-              <a:rPr lang="ko-KR" altLang="en-US" sz="1400" dirty="0" err="1">
+              <a:rPr lang="ko-KR" altLang="en-US" sz="1400" dirty="0">
                 <a:solidFill>
                   <a:schemeClr val="tx2"/>
                 </a:solidFill>
